--- a/docs/03_Operation_Manual_Summary.pptx
+++ b/docs/03_Operation_Manual_Summary.pptx
@@ -3304,7 +3304,7 @@
                 </a:solidFill>
                 <a:latin typeface="Segoe UI"/>
               </a:rPr>
-              <a:t>Maintaining &amp; publishing the P3MAI website — summary</a:t>
+              <a:t>Maintaining &amp; publishing the P3MAI website — summary (v2.0)</a:t>
             </a:r>
           </a:p>
         </p:txBody>
@@ -3465,7 +3465,7 @@
         </p:nvGraphicFramePr>
         <p:xfrm>
           <a:off x="566928" y="1691640"/>
-          <a:ext cx="11064240" cy="2286000"/>
+          <a:ext cx="11064240" cy="2743200"/>
         </p:xfrm>
         <a:graphic>
           <a:graphicData uri="http://schemas.openxmlformats.org/drawingml/2006/table">
@@ -3474,8 +3474,8 @@
                 <a:tableStyleId>{5C22544A-7EE6-4342-B048-85BDC9FD1C3A}</a:tableStyleId>
               </a:tblPr>
               <a:tblGrid>
-                <a:gridCol w="2926080"/>
-                <a:gridCol w="8138160"/>
+                <a:gridCol w="3291840"/>
+                <a:gridCol w="7772400"/>
               </a:tblGrid>
               <a:tr h="457200">
                 <a:tc>
@@ -3604,7 +3604,7 @@
                           </a:solidFill>
                           <a:latin typeface="Segoe UI"/>
                         </a:rPr>
-                        <a:t>Rise (UK shared cPanel/FTP)</a:t>
+                        <a:t>Rise (UK cPanel/FTP) behind StackCDN</a:t>
                       </a:r>
                     </a:p>
                   </a:txBody>
@@ -3628,7 +3628,7 @@
                           </a:solidFill>
                           <a:latin typeface="Segoe UI"/>
                         </a:rPr>
-                        <a:t>Live URL</a:t>
+                        <a:t>Live URL / mailbox</a:t>
                       </a:r>
                     </a:p>
                   </a:txBody>
@@ -3650,7 +3650,7 @@
                           </a:solidFill>
                           <a:latin typeface="Segoe UI"/>
                         </a:rPr>
-                        <a:t>p3mai.com</a:t>
+                        <a:t>p3mai.com · drcolvin@p3mai.com (via contact.php)</a:t>
                       </a:r>
                     </a:p>
                   </a:txBody>
@@ -3696,13 +3696,59 @@
                           </a:solidFill>
                           <a:latin typeface="Segoe UI"/>
                         </a:rPr>
-                        <a:t>python -m http.server 4173</a:t>
+                        <a:t>python -m http.server 4173 (or start-local.bat)</a:t>
                       </a:r>
                     </a:p>
                   </a:txBody>
                   <a:tcPr>
                     <a:solidFill>
                       <a:srgbClr val="F6F7F9"/>
+                    </a:solidFill>
+                  </a:tcPr>
+                </a:tc>
+              </a:tr>
+              <a:tr h="457200">
+                <a:tc>
+                  <a:txBody>
+                    <a:bodyPr wrap="square"/>
+                    <a:lstStyle/>
+                    <a:p>
+                      <a:r>
+                        <a:rPr sz="1100">
+                          <a:solidFill>
+                            <a:srgbClr val="1C2B3A"/>
+                          </a:solidFill>
+                          <a:latin typeface="Segoe UI"/>
+                        </a:rPr>
+                        <a:t>Asset versions (this issue)</a:t>
+                      </a:r>
+                    </a:p>
+                  </a:txBody>
+                  <a:tcPr>
+                    <a:solidFill>
+                      <a:srgbClr val="FFFFFF"/>
+                    </a:solidFill>
+                  </a:tcPr>
+                </a:tc>
+                <a:tc>
+                  <a:txBody>
+                    <a:bodyPr wrap="square"/>
+                    <a:lstStyle/>
+                    <a:p>
+                      <a:r>
+                        <a:rPr sz="1100">
+                          <a:solidFill>
+                            <a:srgbClr val="1C2B3A"/>
+                          </a:solidFill>
+                          <a:latin typeface="Segoe UI"/>
+                        </a:rPr>
+                        <a:t>style.css?v=7 · script.js?v=8</a:t>
+                      </a:r>
+                    </a:p>
+                  </a:txBody>
+                  <a:tcPr>
+                    <a:solidFill>
+                      <a:srgbClr val="FFFFFF"/>
                     </a:solidFill>
                   </a:tcPr>
                 </a:tc>
@@ -3850,7 +3896,7 @@
                 </a:solidFill>
                 <a:latin typeface="Segoe UI Semibold"/>
               </a:rPr>
-              <a:t>Editing content</a:t>
+              <a:t>The CDN cache discipline</a:t>
             </a:r>
           </a:p>
         </p:txBody>
@@ -3932,11 +3978,11 @@
             <a:r>
               <a:rPr sz="1700" b="0">
                 <a:solidFill>
-                  <a:srgbClr val="1C2B3A"/>
+                  <a:srgbClr val="C0392B"/>
                 </a:solidFill>
                 <a:latin typeface="Segoe UI"/>
               </a:rPr>
-              <a:t>•  One HTML file per page; shared style.css and script.js.</a:t>
+              <a:t>•  Any CSS/JS change ⇒ bump its ?v=N in EVERY page and re-upload together.</a:t>
             </a:r>
           </a:p>
           <a:p>
@@ -3951,11 +3997,11 @@
             <a:r>
               <a:rPr sz="1700" b="0">
                 <a:solidFill>
-                  <a:srgbClr val="1C2B3A"/>
+                  <a:srgbClr val="C0392B"/>
                 </a:solidFill>
                 <a:latin typeface="Segoe UI"/>
               </a:rPr>
-              <a:t>•  Keep the header/footer byte-identical across pages (diff after edits).</a:t>
+              <a:t>•  NEVER probe the next ?v=N before the file is deployed — it poisons the cache.</a:t>
             </a:r>
           </a:p>
           <a:p>
@@ -3974,7 +4020,26 @@
                 </a:solidFill>
                 <a:latin typeface="Segoe UI"/>
               </a:rPr>
-              <a:t>•  Verify: CSS braces, HTML tags, node --check script.js.</a:t>
+              <a:t>•  Verify origin with a throwaway query first; pre-warm the real URL after deploy.</a:t>
+            </a:r>
+          </a:p>
+          <a:p>
+            <a:pPr algn="l">
+              <a:spcBef>
+                <a:spcPts val="0"/>
+              </a:spcBef>
+              <a:spcAft>
+                <a:spcPts val="1200"/>
+              </a:spcAft>
+            </a:pPr>
+            <a:r>
+              <a:rPr sz="1700" b="0">
+                <a:solidFill>
+                  <a:srgbClr val="1C2B3A"/>
+                </a:solidFill>
+                <a:latin typeface="Segoe UI"/>
+              </a:rPr>
+              <a:t>•  HIT + old last-modified = stale cache; fresh mtime + old content = wrong zip.</a:t>
             </a:r>
           </a:p>
         </p:txBody>
@@ -4118,7 +4183,7 @@
                 </a:solidFill>
                 <a:latin typeface="Segoe UI Semibold"/>
               </a:rPr>
-              <a:t>Env-aware app links — the rule</a:t>
+              <a:t>The contact-mail pipeline</a:t>
             </a:r>
           </a:p>
         </p:txBody>
@@ -4200,11 +4265,11 @@
             <a:r>
               <a:rPr sz="1700" b="0">
                 <a:solidFill>
-                  <a:srgbClr val="C0392B"/>
+                  <a:srgbClr val="1C2B3A"/>
                 </a:solidFill>
                 <a:latin typeface="Segoe UI"/>
               </a:rPr>
-              <a:t>•  Localhost hrefs in services.html are intentional dev defaults.</a:t>
+              <a:t>•  contact.html → contact.php → drcolvin@p3mai.com (Reply-To = visitor).</a:t>
             </a:r>
           </a:p>
           <a:p>
@@ -4223,7 +4288,7 @@
                 </a:solidFill>
                 <a:latin typeface="Segoe UI"/>
               </a:rPr>
-              <a:t>•  script.js rewrites them to live URLs in production.</a:t>
+              <a:t>•  Honeypot drops bots silently; header-injection guard; length caps.</a:t>
             </a:r>
           </a:p>
           <a:p>
@@ -4242,7 +4307,7 @@
                 </a:solidFill>
                 <a:latin typeface="Segoe UI"/>
               </a:rPr>
-              <a:t>•  To change a target, edit the swap value in script.js — NOT the HTML.</a:t>
+              <a:t>•  PHP doesn't run locally — the form only fully works on Rise.</a:t>
             </a:r>
           </a:p>
           <a:p>
@@ -4261,7 +4326,7 @@
                 </a:solidFill>
                 <a:latin typeface="Segoe UI"/>
               </a:rPr>
-              <a:t>•  Switch Method Map to prince2.p3mai.com once DNS resolves.</a:t>
+              <a:t>•  After any form change: curl test + confirm the email actually arrives.</a:t>
             </a:r>
           </a:p>
         </p:txBody>
@@ -4491,7 +4556,7 @@
                 </a:solidFill>
                 <a:latin typeface="Segoe UI"/>
               </a:rPr>
-              <a:t>•  Upload ONLY the approved files into public_html — never the whole folder.</a:t>
+              <a:t>•  Upload ONLY the allow-list into public_html — never the whole folder.</a:t>
             </a:r>
           </a:p>
           <a:p>
@@ -4510,7 +4575,7 @@
                 </a:solidFill>
                 <a:latin typeface="Segoe UI"/>
               </a:rPr>
-              <a:t>•  Allow-list: the 6 HTML pages, style.css, script.js, favicon, logo set, douglas.jpg, blog thumbs.</a:t>
+              <a:t>•  Allow-list: 14 HTML pages + contact.php + CSS/JS + favicon + 2 logos + 12 images.</a:t>
             </a:r>
           </a:p>
           <a:p>
@@ -4529,7 +4594,7 @@
                 </a:solidFill>
                 <a:latin typeface="Segoe UI"/>
               </a:rPr>
-              <a:t>•  The folder also holds the CV, source images, docs and memory — keep private.</a:t>
+              <a:t>•  Zip hygiene: distinct names per release, fingerprint check, delete after extract.</a:t>
             </a:r>
           </a:p>
         </p:txBody>
@@ -4849,7 +4914,7 @@
                           </a:solidFill>
                           <a:latin typeface="Segoe UI"/>
                         </a:rPr>
-                        <a:t>app.p3mai.com</a:t>
+                        <a:t>apps.p3mai.com</a:t>
                       </a:r>
                     </a:p>
                   </a:txBody>
@@ -4871,7 +4936,7 @@
                           </a:solidFill>
                           <a:latin typeface="Segoe UI"/>
                         </a:rPr>
-                        <a:t>Render (PMO Service)</a:t>
+                        <a:t>Render front door — all six apps at /&lt;slug&gt;</a:t>
                       </a:r>
                     </a:p>
                   </a:txBody>
@@ -4895,7 +4960,7 @@
                           </a:solidFill>
                           <a:latin typeface="Segoe UI"/>
                         </a:rPr>
-                        <a:t>prince2.p3mai.com</a:t>
+                        <a:t>app.p3mai.com</a:t>
                       </a:r>
                     </a:p>
                   </a:txBody>
@@ -4917,7 +4982,7 @@
                           </a:solidFill>
                           <a:latin typeface="Segoe UI"/>
                         </a:rPr>
-                        <a:t>Render (Method Map, DNS pending)</a:t>
+                        <a:t>Legacy 301 → apps.p3mai.com/pmo</a:t>
                       </a:r>
                     </a:p>
                   </a:txBody>
@@ -5071,7 +5136,7 @@
                 </a:solidFill>
                 <a:latin typeface="Segoe UI Semibold"/>
               </a:rPr>
-              <a:t>Troubleshooting</a:t>
+              <a:t>Troubleshooting quick hits</a:t>
             </a:r>
           </a:p>
         </p:txBody>
@@ -5157,7 +5222,7 @@
                 </a:solidFill>
                 <a:latin typeface="Segoe UI"/>
               </a:rPr>
-              <a:t>•  App link shows localhost live → confirm script.js runs.</a:t>
+              <a:t>•  CSS/JS change invisible live → cache: bump ?v=N + pre-warm.</a:t>
             </a:r>
           </a:p>
           <a:p>
@@ -5176,7 +5241,7 @@
                 </a:solidFill>
                 <a:latin typeface="Segoe UI"/>
               </a:rPr>
-              <a:t>•  Cross-links broken locally → serve over http://localhost:4173, not file://.</a:t>
+              <a:t>•  Fresh upload, old content → wrong zip extracted: check the fingerprint.</a:t>
             </a:r>
           </a:p>
           <a:p>
@@ -5195,7 +5260,7 @@
                 </a:solidFill>
                 <a:latin typeface="Segoe UI"/>
               </a:rPr>
-              <a:t>•  Header/footer differ → diff pages, restore the shared shell.</a:t>
+              <a:t>•  No enquiry emails → run the curl mail test; check spam + Rise mail logs.</a:t>
             </a:r>
           </a:p>
           <a:p>
@@ -5214,7 +5279,7 @@
                 </a:solidFill>
                 <a:latin typeface="Segoe UI"/>
               </a:rPr>
-              <a:t>•  A private file went live → remove it, re-publish only the allow-list.</a:t>
+              <a:t>•  Cross-links broken locally → serve over http://, never file://.</a:t>
             </a:r>
           </a:p>
         </p:txBody>
@@ -5444,7 +5509,45 @@
                 </a:solidFill>
                 <a:latin typeface="Segoe UI"/>
               </a:rPr>
-              <a:t>•  Edit → preview at :4173 → verify → commit &amp; push → FTP the changed allow-list files.</a:t>
+              <a:t>•  Edit → preview :4173 → verify (shell diff, braces/tags, node --check) →</a:t>
+            </a:r>
+          </a:p>
+          <a:p>
+            <a:pPr algn="l">
+              <a:spcBef>
+                <a:spcPts val="0"/>
+              </a:spcBef>
+              <a:spcAft>
+                <a:spcPts val="1200"/>
+              </a:spcAft>
+            </a:pPr>
+            <a:r>
+              <a:rPr sz="1700" b="0">
+                <a:solidFill>
+                  <a:srgbClr val="1C2B3A"/>
+                </a:solidFill>
+                <a:latin typeface="Segoe UI"/>
+              </a:rPr>
+              <a:t>•  bump ?v=N if CSS/JS changed → commit &amp; push → upload allow-list files →</a:t>
+            </a:r>
+          </a:p>
+          <a:p>
+            <a:pPr algn="l">
+              <a:spcBef>
+                <a:spcPts val="0"/>
+              </a:spcBef>
+              <a:spcAft>
+                <a:spcPts val="1200"/>
+              </a:spcAft>
+            </a:pPr>
+            <a:r>
+              <a:rPr sz="1700" b="0">
+                <a:solidFill>
+                  <a:srgbClr val="1C2B3A"/>
+                </a:solidFill>
+                <a:latin typeface="Segoe UI"/>
+              </a:rPr>
+              <a:t>•  verify live + pre-warm → mail-test if the form was touched.</a:t>
             </a:r>
           </a:p>
         </p:txBody>

--- a/docs/03_Operation_Manual_Summary.pptx
+++ b/docs/03_Operation_Manual_Summary.pptx
@@ -3220,7 +3220,7 @@
                 </a:solidFill>
                 <a:latin typeface="Segoe UI Semibold"/>
               </a:rPr>
-              <a:t>P3MAI  ·  METHOD MAP</a:t>
+              <a:t>P3MAI  ·  WEBSITE</a:t>
             </a:r>
           </a:p>
         </p:txBody>
